--- a/curso/pptx/S34.pptx
+++ b/curso/pptx/S34.pptx
@@ -3891,8 +3891,8 @@
         </p:nvSpPr>
         <p:spPr>
           <a:xfrm>
-            <a:off x="640000" y="420000"/>
-            <a:ext cx="10912000" cy="420000"/>
+            <a:off x="10652000" y="380000"/>
+            <a:ext cx="900000" cy="800000"/>
           </a:xfrm>
           <a:prstGeom prst="rect">
             <a:avLst/>
@@ -3907,17 +3907,17 @@
           <a:p>
             <a:pPr>
               <a:spcAft>
-                <a:spcPts val="810"/>
-              </a:spcAft>
-            </a:pPr>
-            <a:r>
-              <a:rPr sz="1800" b="1">
+                <a:spcPts val="1980"/>
+              </a:spcAft>
+            </a:pPr>
+            <a:r>
+              <a:rPr sz="4400" b="0">
                 <a:solidFill>
                   <a:srgbClr val="1F2A44"/>
                 </a:solidFill>
                 <a:latin typeface="Nunito Sans"/>
               </a:rPr>
-              <a:t>🦉 Aula de Filosofía</a:t>
+              <a:t>🙃</a:t>
             </a:r>
           </a:p>
         </p:txBody>

--- a/curso/pptx/S34.pptx
+++ b/curso/pptx/S34.pptx
@@ -472,426 +472,6 @@
     </a:lvl9pPr>
   </p:notesStyle>
 </p:notesMaster>
-</file>
-
-<file path=ppt/notesSlides/notesSlide1.xml><?xml version="1.0" encoding="utf-8"?>
-<p:notes xmlns:a="http://schemas.openxmlformats.org/drawingml/2006/main" xmlns:p="http://schemas.openxmlformats.org/presentationml/2006/main" xmlns:r="http://schemas.openxmlformats.org/officeDocument/2006/relationships">
-  <p:cSld>
-    <p:spTree>
-      <p:nvGrpSpPr>
-        <p:cNvPr id="1" name=""/>
-        <p:cNvGrpSpPr/>
-        <p:nvPr/>
-      </p:nvGrpSpPr>
-      <p:grpSpPr>
-        <a:xfrm>
-          <a:off x="0" y="0"/>
-          <a:ext cx="0" cy="0"/>
-          <a:chOff x="0" y="0"/>
-          <a:chExt cx="0" cy="0"/>
-        </a:xfrm>
-      </p:grpSpPr>
-      <p:sp>
-        <p:nvSpPr>
-          <p:cNvPr id="2" name="Slide Image Placeholder 1"/>
-          <p:cNvSpPr>
-            <a:spLocks noGrp="1"/>
-          </p:cNvSpPr>
-          <p:nvPr>
-            <p:ph type="sldImg" idx="2"/>
-          </p:nvPr>
-        </p:nvSpPr>
-        <p:spPr/>
-      </p:sp>
-      <p:sp>
-        <p:nvSpPr>
-          <p:cNvPr id="3" name="Notes Placeholder 2"/>
-          <p:cNvSpPr>
-            <a:spLocks noGrp="1"/>
-          </p:cNvSpPr>
-          <p:nvPr>
-            <p:ph type="body" idx="3" sz="quarter"/>
-          </p:nvPr>
-        </p:nvSpPr>
-        <p:spPr/>
-        <p:txBody>
-          <a:bodyPr/>
-          <a:lstStyle/>
-          <a:p>
-            <a:r>
-              <a:t>3 minutos. Sin apuntes. Es para recordar, no cuenta para nota.</a:t>
-            </a:r>
-          </a:p>
-        </p:txBody>
-      </p:sp>
-      <p:sp>
-        <p:nvSpPr>
-          <p:cNvPr id="4" name="Slide Number Placeholder 3"/>
-          <p:cNvSpPr>
-            <a:spLocks noGrp="1"/>
-          </p:cNvSpPr>
-          <p:nvPr>
-            <p:ph type="sldNum" idx="5" sz="quarter"/>
-          </p:nvPr>
-        </p:nvSpPr>
-        <p:spPr/>
-      </p:sp>
-    </p:spTree>
-  </p:cSld>
-  <p:clrMapOvr>
-    <a:masterClrMapping/>
-  </p:clrMapOvr>
-</p:notes>
-</file>
-
-<file path=ppt/notesSlides/notesSlide2.xml><?xml version="1.0" encoding="utf-8"?>
-<p:notes xmlns:a="http://schemas.openxmlformats.org/drawingml/2006/main" xmlns:p="http://schemas.openxmlformats.org/presentationml/2006/main" xmlns:r="http://schemas.openxmlformats.org/officeDocument/2006/relationships">
-  <p:cSld>
-    <p:spTree>
-      <p:nvGrpSpPr>
-        <p:cNvPr id="1" name=""/>
-        <p:cNvGrpSpPr/>
-        <p:nvPr/>
-      </p:nvGrpSpPr>
-      <p:grpSpPr>
-        <a:xfrm>
-          <a:off x="0" y="0"/>
-          <a:ext cx="0" cy="0"/>
-          <a:chOff x="0" y="0"/>
-          <a:chExt cx="0" cy="0"/>
-        </a:xfrm>
-      </p:grpSpPr>
-      <p:sp>
-        <p:nvSpPr>
-          <p:cNvPr id="2" name="Slide Image Placeholder 1"/>
-          <p:cNvSpPr>
-            <a:spLocks noGrp="1"/>
-          </p:cNvSpPr>
-          <p:nvPr>
-            <p:ph type="sldImg" idx="2"/>
-          </p:nvPr>
-        </p:nvSpPr>
-        <p:spPr/>
-      </p:sp>
-      <p:sp>
-        <p:nvSpPr>
-          <p:cNvPr id="3" name="Notes Placeholder 2"/>
-          <p:cNvSpPr>
-            <a:spLocks noGrp="1"/>
-          </p:cNvSpPr>
-          <p:nvPr>
-            <p:ph type="body" idx="3" sz="quarter"/>
-          </p:nvPr>
-        </p:nvSpPr>
-        <p:spPr/>
-        <p:txBody>
-          <a:bodyPr/>
-          <a:lstStyle/>
-          <a:p>
-            <a:r>
-              <a:t>3 minutos. Sin apuntes. Es para recordar, no cuenta para nota.</a:t>
-            </a:r>
-          </a:p>
-        </p:txBody>
-      </p:sp>
-      <p:sp>
-        <p:nvSpPr>
-          <p:cNvPr id="4" name="Slide Number Placeholder 3"/>
-          <p:cNvSpPr>
-            <a:spLocks noGrp="1"/>
-          </p:cNvSpPr>
-          <p:nvPr>
-            <p:ph type="sldNum" idx="5" sz="quarter"/>
-          </p:nvPr>
-        </p:nvSpPr>
-        <p:spPr/>
-      </p:sp>
-    </p:spTree>
-  </p:cSld>
-  <p:clrMapOvr>
-    <a:masterClrMapping/>
-  </p:clrMapOvr>
-</p:notes>
-</file>
-
-<file path=ppt/notesSlides/notesSlide3.xml><?xml version="1.0" encoding="utf-8"?>
-<p:notes xmlns:a="http://schemas.openxmlformats.org/drawingml/2006/main" xmlns:p="http://schemas.openxmlformats.org/presentationml/2006/main" xmlns:r="http://schemas.openxmlformats.org/officeDocument/2006/relationships">
-  <p:cSld>
-    <p:spTree>
-      <p:nvGrpSpPr>
-        <p:cNvPr id="1" name=""/>
-        <p:cNvGrpSpPr/>
-        <p:nvPr/>
-      </p:nvGrpSpPr>
-      <p:grpSpPr>
-        <a:xfrm>
-          <a:off x="0" y="0"/>
-          <a:ext cx="0" cy="0"/>
-          <a:chOff x="0" y="0"/>
-          <a:chExt cx="0" cy="0"/>
-        </a:xfrm>
-      </p:grpSpPr>
-      <p:sp>
-        <p:nvSpPr>
-          <p:cNvPr id="2" name="Slide Image Placeholder 1"/>
-          <p:cNvSpPr>
-            <a:spLocks noGrp="1"/>
-          </p:cNvSpPr>
-          <p:nvPr>
-            <p:ph type="sldImg" idx="2"/>
-          </p:nvPr>
-        </p:nvSpPr>
-        <p:spPr/>
-      </p:sp>
-      <p:sp>
-        <p:nvSpPr>
-          <p:cNvPr id="3" name="Notes Placeholder 2"/>
-          <p:cNvSpPr>
-            <a:spLocks noGrp="1"/>
-          </p:cNvSpPr>
-          <p:nvPr>
-            <p:ph type="body" idx="3" sz="quarter"/>
-          </p:nvPr>
-        </p:nvSpPr>
-        <p:spPr/>
-        <p:txBody>
-          <a:bodyPr/>
-          <a:lstStyle/>
-          <a:p>
-            <a:r>
-              <a:t>Nadie tiene que contestar: solo pensarlo.</a:t>
-            </a:r>
-          </a:p>
-        </p:txBody>
-      </p:sp>
-      <p:sp>
-        <p:nvSpPr>
-          <p:cNvPr id="4" name="Slide Number Placeholder 3"/>
-          <p:cNvSpPr>
-            <a:spLocks noGrp="1"/>
-          </p:cNvSpPr>
-          <p:nvPr>
-            <p:ph type="sldNum" idx="5" sz="quarter"/>
-          </p:nvPr>
-        </p:nvSpPr>
-        <p:spPr/>
-      </p:sp>
-    </p:spTree>
-  </p:cSld>
-  <p:clrMapOvr>
-    <a:masterClrMapping/>
-  </p:clrMapOvr>
-</p:notes>
-</file>
-
-<file path=ppt/notesSlides/notesSlide4.xml><?xml version="1.0" encoding="utf-8"?>
-<p:notes xmlns:a="http://schemas.openxmlformats.org/drawingml/2006/main" xmlns:p="http://schemas.openxmlformats.org/presentationml/2006/main" xmlns:r="http://schemas.openxmlformats.org/officeDocument/2006/relationships">
-  <p:cSld>
-    <p:spTree>
-      <p:nvGrpSpPr>
-        <p:cNvPr id="1" name=""/>
-        <p:cNvGrpSpPr/>
-        <p:nvPr/>
-      </p:nvGrpSpPr>
-      <p:grpSpPr>
-        <a:xfrm>
-          <a:off x="0" y="0"/>
-          <a:ext cx="0" cy="0"/>
-          <a:chOff x="0" y="0"/>
-          <a:chExt cx="0" cy="0"/>
-        </a:xfrm>
-      </p:grpSpPr>
-      <p:sp>
-        <p:nvSpPr>
-          <p:cNvPr id="2" name="Slide Image Placeholder 1"/>
-          <p:cNvSpPr>
-            <a:spLocks noGrp="1"/>
-          </p:cNvSpPr>
-          <p:nvPr>
-            <p:ph type="sldImg" idx="2"/>
-          </p:nvPr>
-        </p:nvSpPr>
-        <p:spPr/>
-      </p:sp>
-      <p:sp>
-        <p:nvSpPr>
-          <p:cNvPr id="3" name="Notes Placeholder 2"/>
-          <p:cNvSpPr>
-            <a:spLocks noGrp="1"/>
-          </p:cNvSpPr>
-          <p:nvPr>
-            <p:ph type="body" idx="3" sz="quarter"/>
-          </p:nvPr>
-        </p:nvSpPr>
-        <p:spPr/>
-        <p:txBody>
-          <a:bodyPr/>
-          <a:lstStyle/>
-          <a:p>
-            <a:r>
-              <a:t>Dejar unos segundos para que piensen la respuesta fácil antes de enseñar los pasos.</a:t>
-            </a:r>
-          </a:p>
-        </p:txBody>
-      </p:sp>
-      <p:sp>
-        <p:nvSpPr>
-          <p:cNvPr id="4" name="Slide Number Placeholder 3"/>
-          <p:cNvSpPr>
-            <a:spLocks noGrp="1"/>
-          </p:cNvSpPr>
-          <p:nvPr>
-            <p:ph type="sldNum" idx="5" sz="quarter"/>
-          </p:nvPr>
-        </p:nvSpPr>
-        <p:spPr/>
-      </p:sp>
-    </p:spTree>
-  </p:cSld>
-  <p:clrMapOvr>
-    <a:masterClrMapping/>
-  </p:clrMapOvr>
-</p:notes>
-</file>
-
-<file path=ppt/notesSlides/notesSlide5.xml><?xml version="1.0" encoding="utf-8"?>
-<p:notes xmlns:a="http://schemas.openxmlformats.org/drawingml/2006/main" xmlns:p="http://schemas.openxmlformats.org/presentationml/2006/main" xmlns:r="http://schemas.openxmlformats.org/officeDocument/2006/relationships">
-  <p:cSld>
-    <p:spTree>
-      <p:nvGrpSpPr>
-        <p:cNvPr id="1" name=""/>
-        <p:cNvGrpSpPr/>
-        <p:nvPr/>
-      </p:nvGrpSpPr>
-      <p:grpSpPr>
-        <a:xfrm>
-          <a:off x="0" y="0"/>
-          <a:ext cx="0" cy="0"/>
-          <a:chOff x="0" y="0"/>
-          <a:chExt cx="0" cy="0"/>
-        </a:xfrm>
-      </p:grpSpPr>
-      <p:sp>
-        <p:nvSpPr>
-          <p:cNvPr id="2" name="Slide Image Placeholder 1"/>
-          <p:cNvSpPr>
-            <a:spLocks noGrp="1"/>
-          </p:cNvSpPr>
-          <p:nvPr>
-            <p:ph type="sldImg" idx="2"/>
-          </p:nvPr>
-        </p:nvSpPr>
-        <p:spPr/>
-      </p:sp>
-      <p:sp>
-        <p:nvSpPr>
-          <p:cNvPr id="3" name="Notes Placeholder 2"/>
-          <p:cNvSpPr>
-            <a:spLocks noGrp="1"/>
-          </p:cNvSpPr>
-          <p:nvPr>
-            <p:ph type="body" idx="3" sz="quarter"/>
-          </p:nvPr>
-        </p:nvSpPr>
-        <p:spPr/>
-        <p:txBody>
-          <a:bodyPr/>
-          <a:lstStyle/>
-          <a:p>
-            <a:r>
-              <a:t>Dejar 2 minutos para que lo escriban. La diapositiva siguiente muestra el resumen.</a:t>
-            </a:r>
-          </a:p>
-        </p:txBody>
-      </p:sp>
-      <p:sp>
-        <p:nvSpPr>
-          <p:cNvPr id="4" name="Slide Number Placeholder 3"/>
-          <p:cNvSpPr>
-            <a:spLocks noGrp="1"/>
-          </p:cNvSpPr>
-          <p:nvPr>
-            <p:ph type="sldNum" idx="5" sz="quarter"/>
-          </p:nvPr>
-        </p:nvSpPr>
-        <p:spPr/>
-      </p:sp>
-    </p:spTree>
-  </p:cSld>
-  <p:clrMapOvr>
-    <a:masterClrMapping/>
-  </p:clrMapOvr>
-</p:notes>
-</file>
-
-<file path=ppt/notesSlides/notesSlide6.xml><?xml version="1.0" encoding="utf-8"?>
-<p:notes xmlns:a="http://schemas.openxmlformats.org/drawingml/2006/main" xmlns:p="http://schemas.openxmlformats.org/presentationml/2006/main" xmlns:r="http://schemas.openxmlformats.org/officeDocument/2006/relationships">
-  <p:cSld>
-    <p:spTree>
-      <p:nvGrpSpPr>
-        <p:cNvPr id="1" name=""/>
-        <p:cNvGrpSpPr/>
-        <p:nvPr/>
-      </p:nvGrpSpPr>
-      <p:grpSpPr>
-        <a:xfrm>
-          <a:off x="0" y="0"/>
-          <a:ext cx="0" cy="0"/>
-          <a:chOff x="0" y="0"/>
-          <a:chExt cx="0" cy="0"/>
-        </a:xfrm>
-      </p:grpSpPr>
-      <p:sp>
-        <p:nvSpPr>
-          <p:cNvPr id="2" name="Slide Image Placeholder 1"/>
-          <p:cNvSpPr>
-            <a:spLocks noGrp="1"/>
-          </p:cNvSpPr>
-          <p:nvPr>
-            <p:ph type="sldImg" idx="2"/>
-          </p:nvPr>
-        </p:nvSpPr>
-        <p:spPr/>
-      </p:sp>
-      <p:sp>
-        <p:nvSpPr>
-          <p:cNvPr id="3" name="Notes Placeholder 2"/>
-          <p:cNvSpPr>
-            <a:spLocks noGrp="1"/>
-          </p:cNvSpPr>
-          <p:nvPr>
-            <p:ph type="body" idx="3" sz="quarter"/>
-          </p:nvPr>
-        </p:nvSpPr>
-        <p:spPr/>
-        <p:txBody>
-          <a:bodyPr/>
-          <a:lstStyle/>
-          <a:p>
-            <a:r>
-              <a:t>Buscar: «lectura lateral verificar información» · «búsqueda inversa de imágenes cómo se hace»</a:t>
-            </a:r>
-          </a:p>
-        </p:txBody>
-      </p:sp>
-      <p:sp>
-        <p:nvSpPr>
-          <p:cNvPr id="4" name="Slide Number Placeholder 3"/>
-          <p:cNvSpPr>
-            <a:spLocks noGrp="1"/>
-          </p:cNvSpPr>
-          <p:nvPr>
-            <p:ph type="sldNum" idx="5" sz="quarter"/>
-          </p:nvPr>
-        </p:nvSpPr>
-        <p:spPr/>
-      </p:sp>
-    </p:spTree>
-  </p:cSld>
-  <p:clrMapOvr>
-    <a:masterClrMapping/>
-  </p:clrMapOvr>
-</p:notes>
 </file>
 
 <file path=ppt/slideLayouts/slideLayout1.xml><?xml version="1.0" encoding="utf-8"?>

--- a/curso/pptx/S34.pptx
+++ b/curso/pptx/S34.pptx
@@ -4213,7 +4213,7 @@
                 </a:solidFill>
                 <a:latin typeface="Nunito Sans"/>
               </a:rPr>
-              <a:t>A Dylan le llega: «¡Suspendidas las clases en Bizkaia por la nieve!». Nieva un poco y parece verdad.</a:t>
+              <a:t>A un chico le llega: «¡Suspendidas las clases en Bizkaia por la nieve!». Nieva un poco y parece verdad.</a:t>
             </a:r>
           </a:p>
         </p:txBody>
@@ -4831,7 +4831,7 @@
                 </a:solidFill>
                 <a:latin typeface="Nunito Sans"/>
               </a:rPr>
-              <a:t>Chen hace una búsqueda inversa de una foto de una manifestación en Bilbao. No aparece en ningún otro sitio. «Entonces es real y de hoy», piensa.</a:t>
+              <a:t>Un chico hace una búsqueda inversa de una foto de una manifestación en Bilbao. No aparece en ningún otro sitio. «Entonces es real y de hoy», piensa.</a:t>
             </a:r>
           </a:p>
         </p:txBody>
@@ -6154,7 +6154,7 @@
                 </a:solidFill>
                 <a:latin typeface="Nunito Sans"/>
               </a:rPr>
-              <a:t>Hoy un experimento como el de Milgram no estaría ______.  (sesión 29)</a:t>
+              <a:t>Hoy un experimento como el de las descargas no estaría ______.  (sesión 29)</a:t>
             </a:r>
           </a:p>
         </p:txBody>
@@ -6392,7 +6392,7 @@
                 </a:solidFill>
                 <a:latin typeface="Nunito Sans"/>
               </a:rPr>
-              <a:t>Hoy un experimento como el de Milgram no estaría </a:t>
+              <a:t>Hoy un experimento como el de las descargas no estaría </a:t>
             </a:r>
             <a:r>
               <a:rPr sz="2600" b="1">

--- a/curso/pptx/S34.pptx
+++ b/curso/pptx/S34.pptx
@@ -3575,7 +3575,7 @@
                 </a:solidFill>
                 <a:latin typeface="Fredoka"/>
               </a:rPr>
-              <a:t>Verificar</a:t>
+              <a:t>Bulos</a:t>
             </a:r>
           </a:p>
         </p:txBody>
@@ -3614,7 +3614,7 @@
                 </a:solidFill>
                 <a:latin typeface="Nunito Sans"/>
               </a:rPr>
-              <a:t>Para verificar, sal de la página y mira qué dicen otros (lectura lateral), mira la fecha y busca el origen de la imagen.</a:t>
+              <a:t>Un bulo es una mentira que se hace pasar por noticia; alguien lo fabrica para engañar y lo compartimos porque nos emociona.</a:t>
             </a:r>
           </a:p>
         </p:txBody>
@@ -3633,7 +3633,7 @@
     <p:bg>
       <p:bgPr>
         <a:solidFill>
-          <a:srgbClr val="1F2A44"/>
+          <a:srgbClr val="FBF7EF"/>
         </a:solidFill>
         <a:effectLst/>
       </p:bgPr>
@@ -3653,8 +3653,8 @@
         </p:nvSpPr>
         <p:spPr>
           <a:xfrm>
-            <a:off x="640000" y="2300000"/>
-            <a:ext cx="10912000" cy="500000"/>
+            <a:off x="640000" y="380000"/>
+            <a:ext cx="10912000" cy="420000"/>
           </a:xfrm>
           <a:prstGeom prst="rect">
             <a:avLst/>
@@ -3669,17 +3669,17 @@
           <a:p>
             <a:pPr>
               <a:spcAft>
-                <a:spcPts val="810"/>
-              </a:spcAft>
-            </a:pPr>
-            <a:r>
-              <a:rPr sz="1800" b="1">
-                <a:solidFill>
-                  <a:srgbClr val="F4B183"/>
-                </a:solidFill>
-                <a:latin typeface="Nunito Sans"/>
-              </a:rPr>
-              <a:t>BLOQUE 2</a:t>
+                <a:spcPts val="630"/>
+              </a:spcAft>
+            </a:pPr>
+            <a:r>
+              <a:rPr sz="1400" b="1">
+                <a:solidFill>
+                  <a:srgbClr val="E8793A"/>
+                </a:solidFill>
+                <a:latin typeface="Nunito Sans"/>
+              </a:rPr>
+              <a:t>BLOQUE 2 · POR QUÉ SE COMPARTEN</a:t>
             </a:r>
           </a:p>
         </p:txBody>
@@ -3692,7 +3692,7 @@
         </p:nvSpPr>
         <p:spPr>
           <a:xfrm>
-            <a:off x="640000" y="2800000"/>
+            <a:off x="640000" y="760000"/>
             <a:ext cx="10912000" cy="800000"/>
           </a:xfrm>
           <a:prstGeom prst="rect">
@@ -3708,17 +3708,233 @@
           <a:p>
             <a:pPr>
               <a:spcAft>
-                <a:spcPts val="2160"/>
-              </a:spcAft>
-            </a:pPr>
-            <a:r>
-              <a:rPr sz="4800" b="1">
-                <a:solidFill>
-                  <a:srgbClr val="FBF7EF"/>
+                <a:spcPts val="1710"/>
+              </a:spcAft>
+            </a:pPr>
+            <a:r>
+              <a:rPr sz="3800" b="1">
+                <a:solidFill>
+                  <a:srgbClr val="1F2A44"/>
                 </a:solidFill>
                 <a:latin typeface="Fredoka"/>
               </a:rPr>
-              <a:t>Casos resueltos</a:t>
+              <a:t>Posverdad</a:t>
+            </a:r>
+          </a:p>
+        </p:txBody>
+      </p:sp>
+      <p:sp>
+        <p:nvSpPr>
+          <p:cNvPr id="4" name="Rectangle 3"/>
+          <p:cNvSpPr/>
+          <p:nvPr/>
+        </p:nvSpPr>
+        <p:spPr>
+          <a:xfrm>
+            <a:off x="640000" y="1650000"/>
+            <a:ext cx="10912000" cy="1150000"/>
+          </a:xfrm>
+          <a:prstGeom prst="rect">
+            <a:avLst/>
+          </a:prstGeom>
+          <a:solidFill>
+            <a:srgbClr val="EAF0F7"/>
+          </a:solidFill>
+          <a:ln>
+            <a:noFill/>
+          </a:ln>
+        </p:spPr>
+        <p:style>
+          <a:lnRef idx="1">
+            <a:schemeClr val="accent1"/>
+          </a:lnRef>
+          <a:fillRef idx="3">
+            <a:schemeClr val="accent1"/>
+          </a:fillRef>
+          <a:effectRef idx="2">
+            <a:schemeClr val="accent1"/>
+          </a:effectRef>
+          <a:fontRef idx="minor">
+            <a:schemeClr val="lt1"/>
+          </a:fontRef>
+        </p:style>
+        <p:txBody>
+          <a:bodyPr rtlCol="0" anchor="ctr"/>
+          <a:lstStyle/>
+          <a:p>
+            <a:pPr algn="ctr"/>
+          </a:p>
+        </p:txBody>
+      </p:sp>
+      <p:sp>
+        <p:nvSpPr>
+          <p:cNvPr id="5" name="TextBox 4"/>
+          <p:cNvSpPr txBox="1"/>
+          <p:nvPr/>
+        </p:nvSpPr>
+        <p:spPr>
+          <a:xfrm>
+            <a:off x="840000" y="1730000"/>
+            <a:ext cx="10512000" cy="1000000"/>
+          </a:xfrm>
+          <a:prstGeom prst="rect">
+            <a:avLst/>
+          </a:prstGeom>
+          <a:noFill/>
+        </p:spPr>
+        <p:txBody>
+          <a:bodyPr wrap="square" anchor="ctr">
+            <a:spAutoFit/>
+          </a:bodyPr>
+          <a:lstStyle/>
+          <a:p>
+            <a:pPr>
+              <a:spcAft>
+                <a:spcPts val="1260"/>
+              </a:spcAft>
+            </a:pPr>
+            <a:r>
+              <a:rPr sz="2800" b="1">
+                <a:solidFill>
+                  <a:srgbClr val="1F2A44"/>
+                </a:solidFill>
+                <a:latin typeface="Nunito Sans"/>
+              </a:rPr>
+              <a:t>Hablamos de </a:t>
+            </a:r>
+            <a:r>
+              <a:rPr sz="2800" b="1">
+                <a:solidFill>
+                  <a:srgbClr val="1F2A44"/>
+                </a:solidFill>
+                <a:latin typeface="Nunito Sans"/>
+              </a:rPr>
+              <a:t>posverdad</a:t>
+            </a:r>
+            <a:r>
+              <a:rPr sz="2800" b="1">
+                <a:solidFill>
+                  <a:srgbClr val="1F2A44"/>
+                </a:solidFill>
+                <a:latin typeface="Nunito Sans"/>
+              </a:rPr>
+              <a:t> cuando la emoción y lo que ya creemos pesan más que los hechos.</a:t>
+            </a:r>
+          </a:p>
+        </p:txBody>
+      </p:sp>
+      <p:sp>
+        <p:nvSpPr>
+          <p:cNvPr id="6" name="TextBox 5"/>
+          <p:cNvSpPr txBox="1"/>
+          <p:nvPr/>
+        </p:nvSpPr>
+        <p:spPr>
+          <a:xfrm>
+            <a:off x="640000" y="3000000"/>
+            <a:ext cx="10912000" cy="3458000"/>
+          </a:xfrm>
+          <a:prstGeom prst="rect">
+            <a:avLst/>
+          </a:prstGeom>
+          <a:noFill/>
+        </p:spPr>
+        <p:txBody>
+          <a:bodyPr wrap="square">
+            <a:spAutoFit/>
+          </a:bodyPr>
+          <a:lstStyle/>
+          <a:p>
+            <a:pPr>
+              <a:spcAft>
+                <a:spcPts val="1260"/>
+              </a:spcAft>
+            </a:pPr>
+            <a:r>
+              <a:rPr sz="2800" b="1">
+                <a:solidFill>
+                  <a:srgbClr val="E8793A"/>
+                </a:solidFill>
+                <a:latin typeface="Nunito Sans"/>
+              </a:rPr>
+              <a:t>• </a:t>
+            </a:r>
+            <a:r>
+              <a:rPr sz="2800" b="0">
+                <a:solidFill>
+                  <a:srgbClr val="1F2A44"/>
+                </a:solidFill>
+                <a:latin typeface="Nunito Sans"/>
+              </a:rPr>
+              <a:t>Un bulo triunfa si nos </a:t>
+            </a:r>
+            <a:r>
+              <a:rPr sz="2800" b="1">
+                <a:solidFill>
+                  <a:srgbClr val="1F2A44"/>
+                </a:solidFill>
+                <a:latin typeface="Nunito Sans"/>
+              </a:rPr>
+              <a:t>emociona</a:t>
+            </a:r>
+            <a:r>
+              <a:rPr sz="2800" b="0">
+                <a:solidFill>
+                  <a:srgbClr val="1F2A44"/>
+                </a:solidFill>
+                <a:latin typeface="Nunito Sans"/>
+              </a:rPr>
+              <a:t> o nos da la razón</a:t>
+            </a:r>
+          </a:p>
+          <a:p>
+            <a:pPr>
+              <a:spcAft>
+                <a:spcPts val="1260"/>
+              </a:spcAft>
+            </a:pPr>
+            <a:r>
+              <a:rPr sz="2800" b="1">
+                <a:solidFill>
+                  <a:srgbClr val="E8793A"/>
+                </a:solidFill>
+                <a:latin typeface="Nunito Sans"/>
+              </a:rPr>
+              <a:t>• </a:t>
+            </a:r>
+            <a:r>
+              <a:rPr sz="2800" b="0">
+                <a:solidFill>
+                  <a:srgbClr val="1F2A44"/>
+                </a:solidFill>
+                <a:latin typeface="Nunito Sans"/>
+              </a:rPr>
+              <a:t>Que un mensaje nos guste no lo hace verdadero</a:t>
+            </a:r>
+          </a:p>
+          <a:p>
+            <a:pPr>
+              <a:spcAft>
+                <a:spcPts val="1260"/>
+              </a:spcAft>
+            </a:pPr>
+            <a:r>
+              <a:rPr sz="2800" b="1">
+                <a:solidFill>
+                  <a:srgbClr val="E8793A"/>
+                </a:solidFill>
+                <a:latin typeface="Nunito Sans"/>
+              </a:rPr>
+              <a:t>• </a:t>
+            </a:r>
+            <a:r>
+              <a:rPr sz="2800" b="0">
+                <a:solidFill>
+                  <a:srgbClr val="1F2A44"/>
+                </a:solidFill>
+                <a:latin typeface="Nunito Sans"/>
+              </a:rPr>
+              <a:t>Para pensar: si comparto un bulo sin saberlo, ¿tengo alguna responsabilidad?</a:t>
             </a:r>
           </a:p>
         </p:txBody>
@@ -3783,7 +3999,7 @@
                 </a:solidFill>
                 <a:latin typeface="Nunito Sans"/>
               </a:rPr>
-              <a:t>BLOQUE 2 · CASOS RESUELTOS</a:t>
+              <a:t>BLOQUE 2 · POR QUÉ SE COMPARTEN</a:t>
             </a:r>
           </a:p>
         </p:txBody>
@@ -3822,7 +4038,7 @@
                 </a:solidFill>
                 <a:latin typeface="Fredoka"/>
               </a:rPr>
-              <a:t>Caso 1 · La web del wifi</a:t>
+              <a:t>Caso 1 · El corte de agua</a:t>
             </a:r>
           </a:p>
         </p:txBody>
@@ -3904,7 +4120,7 @@
                 </a:solidFill>
                 <a:latin typeface="Nunito Sans"/>
               </a:rPr>
-              <a:t>La web profesional dice que el wifi del instituto daña el cerebro. Imagina que buscas su nombre en otra pestaña.</a:t>
+              <a:t>«¡Urgente! Mañana cortan el agua en todo Bilbao durante tres días. Reenvía a todos tus grupos.»</a:t>
             </a:r>
           </a:p>
         </p:txBody>
@@ -3952,7 +4168,7 @@
                 </a:solidFill>
                 <a:latin typeface="Nunito Sans"/>
               </a:rPr>
-              <a:t>Lectura lateral: descubres que la web vende aparatos «contra las ondas».</a:t>
+              <a:t>Ingredientes: urgencia («¡Urgente!») y petición de reenviar.</a:t>
             </a:r>
           </a:p>
           <a:p>
@@ -3977,7 +4193,7 @@
                 </a:solidFill>
                 <a:latin typeface="Nunito Sans"/>
               </a:rPr>
-              <a:t>¿Qué dicen los organismos de salud? No han encontrado daño con los niveles normales del wifi.</a:t>
+              <a:t>¿Quién lo dice? Nadie: no hay fuente.</a:t>
             </a:r>
           </a:p>
           <a:p>
@@ -4002,7 +4218,7 @@
                 </a:solidFill>
                 <a:latin typeface="Nunito Sans"/>
               </a:rPr>
-              <a:t>La web tiene un interés y va contra el consenso (sesión 26).</a:t>
+              <a:t>¿Dónde lo compruebo? En la web del Ayuntamiento o de la empresa del agua.</a:t>
             </a:r>
           </a:p>
           <a:p>
@@ -4027,7 +4243,7 @@
                 </a:solidFill>
                 <a:latin typeface="Nunito Sans"/>
               </a:rPr>
-              <a:t>Conclusión: el diseño bonito no era una razón. No me lo creo.</a:t>
+              <a:t>Conclusión: tiene cara de bulo. No lo reenvío hasta comprobarlo.</a:t>
             </a:r>
           </a:p>
         </p:txBody>
@@ -4092,7 +4308,7 @@
                 </a:solidFill>
                 <a:latin typeface="Nunito Sans"/>
               </a:rPr>
-              <a:t>BLOQUE 2 · CASOS RESUELTOS</a:t>
+              <a:t>BLOQUE 2 · POR QUÉ SE COMPARTEN</a:t>
             </a:r>
           </a:p>
         </p:txBody>
@@ -4131,7 +4347,7 @@
                 </a:solidFill>
                 <a:latin typeface="Fredoka"/>
               </a:rPr>
-              <a:t>Caso 2 · La nieve</a:t>
+              <a:t>Caso 2 · El «amigo policía»</a:t>
             </a:r>
           </a:p>
         </p:txBody>
@@ -4213,7 +4429,7 @@
                 </a:solidFill>
                 <a:latin typeface="Nunito Sans"/>
               </a:rPr>
-              <a:t>A un chico le llega: «¡Suspendidas las clases en Bizkaia por la nieve!». Nieva un poco y parece verdad.</a:t>
+              <a:t>Audio de WhatsApp: «Mi cuñado es policía y dice que están raptando a chicos en los centros comerciales de Bizkaia».</a:t>
             </a:r>
           </a:p>
         </p:txBody>
@@ -4261,7 +4477,7 @@
                 </a:solidFill>
                 <a:latin typeface="Nunito Sans"/>
               </a:rPr>
-              <a:t>Mira la fecha de la noticia: es de hace varios años.</a:t>
+              <a:t>Fuente vaga: un cuñado sin nombre.</a:t>
             </a:r>
           </a:p>
           <a:p>
@@ -4286,7 +4502,7 @@
                 </a:solidFill>
                 <a:latin typeface="Nunito Sans"/>
               </a:rPr>
-              <a:t>Alguien la ha vuelto a compartir hoy.</a:t>
+              <a:t>Emoción fuerte: miedo, mucho miedo.</a:t>
             </a:r>
           </a:p>
           <a:p>
@@ -4311,7 +4527,7 @@
                 </a:solidFill>
                 <a:latin typeface="Nunito Sans"/>
               </a:rPr>
-              <a:t>¿Lo dice hoy el Departamento de Educación o el instituto? No.</a:t>
+              <a:t>¿Lo cuentan la policía o los medios serios? No.</a:t>
             </a:r>
           </a:p>
           <a:p>
@@ -4336,7 +4552,7 @@
                 </a:solidFill>
                 <a:latin typeface="Nunito Sans"/>
               </a:rPr>
-              <a:t>Conclusión: noticia vieja, no nueva. Mañana hay clase.</a:t>
+              <a:t>Conclusión: tiene todas las señales de un bulo. No lo reenvío; si me preocupa, se lo cuento a un adulto.</a:t>
             </a:r>
           </a:p>
         </p:txBody>
@@ -4401,7 +4617,7 @@
                 </a:solidFill>
                 <a:latin typeface="Nunito Sans"/>
               </a:rPr>
-              <a:t>BLOQUE 2 · CASOS RESUELTOS</a:t>
+              <a:t>BLOQUE 2 · POR QUÉ SE COMPARTEN</a:t>
             </a:r>
           </a:p>
         </p:txBody>
@@ -4440,7 +4656,7 @@
                 </a:solidFill>
                 <a:latin typeface="Fredoka"/>
               </a:rPr>
-              <a:t>Caso 3 · El tiburón en la autopista</a:t>
+              <a:t>Caso 3 · La foto de la inundación</a:t>
             </a:r>
           </a:p>
         </p:txBody>
@@ -4522,7 +4738,7 @@
                 </a:solidFill>
                 <a:latin typeface="Nunito Sans"/>
               </a:rPr>
-              <a:t>Después de muchas grandes tormentas circula la misma foto: un tiburón nadando por una autopista inundada.</a:t>
+              <a:t>Una foto real de una calle inundada, con el texto «Bilbao, ayer». La foto es de otro país y de hace cinco años.</a:t>
             </a:r>
           </a:p>
         </p:txBody>
@@ -4570,7 +4786,7 @@
                 </a:solidFill>
                 <a:latin typeface="Nunito Sans"/>
               </a:rPr>
-              <a:t>Hago una búsqueda inversa de la imagen.</a:t>
+              <a:t>¿La foto es falsa? No: la inundación pasó de verdad.</a:t>
             </a:r>
           </a:p>
           <a:p>
@@ -4595,7 +4811,7 @@
                 </a:solidFill>
                 <a:latin typeface="Nunito Sans"/>
               </a:rPr>
-              <a:t>Aparece en tormentas de distintos países, desde hace más de diez años.</a:t>
+              <a:t>¿Qué es falso? El lugar y la fecha.</a:t>
             </a:r>
           </a:p>
           <a:p>
@@ -4620,7 +4836,7 @@
                 </a:solidFill>
                 <a:latin typeface="Nunito Sans"/>
               </a:rPr>
-              <a:t>Los verificadores explican que es un montaje: el tiburón viene de otra foto.</a:t>
+              <a:t>Es el bulo más fácil de fabricar: no hay que inventar la imagen.</a:t>
             </a:r>
           </a:p>
           <a:p>
@@ -4645,7 +4861,7 @@
                 </a:solidFill>
                 <a:latin typeface="Nunito Sans"/>
               </a:rPr>
-              <a:t>Conclusión: imagen falsa. La búsqueda inversa lo descubre en un minuto.</a:t>
+              <a:t>Conclusión: una foto verdadera con un contexto falso también es un bulo.</a:t>
             </a:r>
           </a:p>
         </p:txBody>
@@ -4710,7 +4926,7 @@
                 </a:solidFill>
                 <a:latin typeface="Nunito Sans"/>
               </a:rPr>
-              <a:t>CASO TRAMPA · BLOQUE 2 · CASOS RESUELTOS</a:t>
+              <a:t>CASO TRAMPA · BLOQUE 2 · POR QUÉ SE COMPARTEN</a:t>
             </a:r>
           </a:p>
         </p:txBody>
@@ -4749,7 +4965,7 @@
                 </a:solidFill>
                 <a:latin typeface="Fredoka"/>
               </a:rPr>
-              <a:t>⚠ La búsqueda que no encuentra nada</a:t>
+              <a:t>⚠ El aviso de emergencias</a:t>
             </a:r>
           </a:p>
         </p:txBody>
@@ -4831,7 +5047,7 @@
                 </a:solidFill>
                 <a:latin typeface="Nunito Sans"/>
               </a:rPr>
-              <a:t>Un chico hace una búsqueda inversa de una foto de una manifestación en Bilbao. No aparece en ningún otro sitio. «Entonces es real y de hoy», piensa.</a:t>
+              <a:t>Mensaje: «¡Alerta roja por lluvias! No bajes al garaje ni cojas el coche. Pásalo a tu familia». Lo firma el servicio oficial de emergencias. (Ejemplo inventado.)</a:t>
             </a:r>
           </a:p>
         </p:txBody>
@@ -4879,7 +5095,7 @@
                 </a:solidFill>
                 <a:latin typeface="Nunito Sans"/>
               </a:rPr>
-              <a:t>Si no aparece antes en internet, ¿está comprobado que es auténtica?</a:t>
+              <a:t>Urgencia, miedo y «pásalo»: ¿es un bulo?</a:t>
             </a:r>
           </a:p>
           <a:p>
@@ -4904,7 +5120,7 @@
                 </a:solidFill>
                 <a:latin typeface="Nunito Sans"/>
               </a:rPr>
-              <a:t>La búsqueda inversa solo encuentra fotos que ya están en internet.</a:t>
+              <a:t>Tiene ingredientes de bulo: urgencia, miedo y petición de reenviar.</a:t>
             </a:r>
           </a:p>
           <a:p>
@@ -4929,7 +5145,7 @@
                 </a:solidFill>
                 <a:latin typeface="Nunito Sans"/>
               </a:rPr>
-              <a:t>Una foto nueva, recortada o hecha con inteligencia artificial puede no salir.</a:t>
+              <a:t>Pero miro la fuente: sale en la web oficial de emergencias y en los medios serios.</a:t>
             </a:r>
           </a:p>
           <a:p>
@@ -4954,16 +5170,23 @@
                 </a:solidFill>
                 <a:latin typeface="Nunito Sans"/>
               </a:rPr>
-              <a:t>No encontrar nada no </a:t>
-            </a:r>
+              <a:t>Los avisos de verdad también son urgentes: a veces hay prisa de verdad.</a:t>
+            </a:r>
+          </a:p>
+          <a:p>
+            <a:pPr>
+              <a:spcAft>
+                <a:spcPts val="1080"/>
+              </a:spcAft>
+            </a:pPr>
             <a:r>
               <a:rPr sz="2400" b="1">
                 <a:solidFill>
-                  <a:srgbClr val="1F2A44"/>
-                </a:solidFill>
-                <a:latin typeface="Nunito Sans"/>
-              </a:rPr>
-              <a:t>prueba</a:t>
+                  <a:srgbClr val="E8793A"/>
+                </a:solidFill>
+                <a:latin typeface="Nunito Sans"/>
+              </a:rPr>
+              <a:t>5. </a:t>
             </a:r>
             <a:r>
               <a:rPr sz="2400" b="0">
@@ -4972,23 +5195,16 @@
                 </a:solidFill>
                 <a:latin typeface="Nunito Sans"/>
               </a:rPr>
-              <a:t> nada: ni que sea verdad ni que sea mentira.</a:t>
-            </a:r>
-          </a:p>
-          <a:p>
-            <a:pPr>
-              <a:spcAft>
-                <a:spcPts val="1080"/>
-              </a:spcAft>
-            </a:pPr>
+              <a:t>Conclusión: los ingredientes son señales para sospechar, no </a:t>
+            </a:r>
             <a:r>
               <a:rPr sz="2400" b="1">
                 <a:solidFill>
-                  <a:srgbClr val="E8793A"/>
-                </a:solidFill>
-                <a:latin typeface="Nunito Sans"/>
-              </a:rPr>
-              <a:t>5. </a:t>
+                  <a:srgbClr val="1F2A44"/>
+                </a:solidFill>
+                <a:latin typeface="Nunito Sans"/>
+              </a:rPr>
+              <a:t>pruebas</a:t>
             </a:r>
             <a:r>
               <a:rPr sz="2400" b="0">
@@ -4997,7 +5213,7 @@
                 </a:solidFill>
                 <a:latin typeface="Nunito Sans"/>
               </a:rPr>
-              <a:t>Conclusión: verificar no siempre da respuesta. A veces lo honesto es «todavía no lo sé» y esperar.</a:t>
+              <a:t>. Lo que decide es comprobar la fuente.</a:t>
             </a:r>
           </a:p>
         </p:txBody>
@@ -5253,7 +5469,7 @@
                 </a:solidFill>
                 <a:latin typeface="Nunito Sans"/>
               </a:rPr>
-              <a:t>Verificar es comprobar antes de creer o compartir.</a:t>
+              <a:t>Un bulo es una mentira inventada que se hace pasar por noticia.</a:t>
             </a:r>
           </a:p>
           <a:p>
@@ -5278,7 +5494,7 @@
                 </a:solidFill>
                 <a:latin typeface="Nunito Sans"/>
               </a:rPr>
-              <a:t>La lectura lateral es salir de la página y mirar qué dicen otros.</a:t>
+              <a:t>Sus señales: urgencia, emoción fuerte, fuente vaga y sin fechas; son pistas, no pruebas.</a:t>
             </a:r>
           </a:p>
           <a:p>
@@ -5303,7 +5519,7 @@
                 </a:solidFill>
                 <a:latin typeface="Nunito Sans"/>
               </a:rPr>
-              <a:t>Mira la fecha y el origen de la imagen; si no encuentras nada, espera.</a:t>
+              <a:t>Lo compartimos porque nos emociona: antes de reenviar, para y comprueba.</a:t>
             </a:r>
           </a:p>
         </p:txBody>
@@ -5407,7 +5623,7 @@
                 </a:solidFill>
                 <a:latin typeface="Fredoka"/>
               </a:rPr>
-              <a:t>Lectura lateral y búsqueda inversa de imágenes</a:t>
+              <a:t>Qué es un bulo y por qué se extiende tan rápido</a:t>
             </a:r>
           </a:p>
         </p:txBody>
@@ -5446,7 +5662,7 @@
                 </a:solidFill>
                 <a:latin typeface="Nunito Sans"/>
               </a:rPr>
-              <a:t>Que vean en pantalla cómo se hace la lectura lateral y una búsqueda inversa, paso a paso.</a:t>
+              <a:t>Que vean ejemplos reales de bulos y los ingredientes que los hacen tan fáciles de compartir.</a:t>
             </a:r>
           </a:p>
         </p:txBody>
@@ -6104,7 +6320,7 @@
                 </a:solidFill>
                 <a:latin typeface="Nunito Sans"/>
               </a:rPr>
-              <a:t>Los ingredientes de un bulo son señales para sospechar, no ______.  (sesión 33)</a:t>
+              <a:t>Una palabra ______ en el titular no basta para decir que es clickbait.  (sesión 33)</a:t>
             </a:r>
           </a:p>
           <a:p>
@@ -6129,7 +6345,7 @@
                 </a:solidFill>
                 <a:latin typeface="Nunito Sans"/>
               </a:rPr>
-              <a:t>Ingredientes de un bulo: ______, emoción fuerte y fuente vaga.  (sesión 33)</a:t>
+              <a:t>Muchas webs ganan ______ con cada clic y cada anuncio.  (sesión 33)</a:t>
             </a:r>
           </a:p>
           <a:p>
@@ -6154,7 +6370,7 @@
                 </a:solidFill>
                 <a:latin typeface="Nunito Sans"/>
               </a:rPr>
-              <a:t>Hoy un experimento como el de las descargas no estaría ______.  (sesión 29)</a:t>
+              <a:t>El razonamiento circular da vueltas en ______ y no avanza.  (sesión 29)</a:t>
             </a:r>
           </a:p>
         </p:txBody>
@@ -6306,7 +6522,7 @@
                 </a:solidFill>
                 <a:latin typeface="Nunito Sans"/>
               </a:rPr>
-              <a:t>Los ingredientes de un bulo son señales para sospechar, no </a:t>
+              <a:t>Una palabra </a:t>
             </a:r>
             <a:r>
               <a:rPr sz="2600" b="1">
@@ -6315,7 +6531,7 @@
                 </a:solidFill>
                 <a:latin typeface="Nunito Sans"/>
               </a:rPr>
-              <a:t>pruebas</a:t>
+              <a:t>llamativa</a:t>
             </a:r>
             <a:r>
               <a:rPr sz="2600" b="0">
@@ -6324,7 +6540,7 @@
                 </a:solidFill>
                 <a:latin typeface="Nunito Sans"/>
               </a:rPr>
-              <a:t>.  (sesión 33)</a:t>
+              <a:t> en el titular no basta para decir que es clickbait.  (sesión 33)</a:t>
             </a:r>
           </a:p>
           <a:p>
@@ -6349,7 +6565,7 @@
                 </a:solidFill>
                 <a:latin typeface="Nunito Sans"/>
               </a:rPr>
-              <a:t>Ingredientes de un bulo: </a:t>
+              <a:t>Muchas webs ganan </a:t>
             </a:r>
             <a:r>
               <a:rPr sz="2600" b="1">
@@ -6358,7 +6574,7 @@
                 </a:solidFill>
                 <a:latin typeface="Nunito Sans"/>
               </a:rPr>
-              <a:t>urgencia</a:t>
+              <a:t>dinero</a:t>
             </a:r>
             <a:r>
               <a:rPr sz="2600" b="0">
@@ -6367,7 +6583,7 @@
                 </a:solidFill>
                 <a:latin typeface="Nunito Sans"/>
               </a:rPr>
-              <a:t>, emoción fuerte y fuente vaga.  (sesión 33)</a:t>
+              <a:t> con cada clic y cada anuncio.  (sesión 33)</a:t>
             </a:r>
           </a:p>
           <a:p>
@@ -6392,7 +6608,7 @@
                 </a:solidFill>
                 <a:latin typeface="Nunito Sans"/>
               </a:rPr>
-              <a:t>Hoy un experimento como el de las descargas no estaría </a:t>
+              <a:t>El razonamiento circular da vueltas en </a:t>
             </a:r>
             <a:r>
               <a:rPr sz="2600" b="1">
@@ -6401,7 +6617,7 @@
                 </a:solidFill>
                 <a:latin typeface="Nunito Sans"/>
               </a:rPr>
-              <a:t>permitido</a:t>
+              <a:t>círculo</a:t>
             </a:r>
             <a:r>
               <a:rPr sz="2600" b="0">
@@ -6410,7 +6626,7 @@
                 </a:solidFill>
                 <a:latin typeface="Nunito Sans"/>
               </a:rPr>
-              <a:t>.  (sesión 29)</a:t>
+              <a:t> y no avanza.  (sesión 29)</a:t>
             </a:r>
           </a:p>
         </p:txBody>
@@ -6557,7 +6773,7 @@
                 </a:solidFill>
                 <a:latin typeface="Nunito Sans"/>
               </a:rPr>
-              <a:t>Una web muy profesional, con logo bonito y muchas gráficas, dice que el wifi del instituto daña el cerebro.</a:t>
+              <a:t>«¡Urgente! Mañana cortan el agua en todo Bilbao durante tres días. Reenvía a todos tus grupos.»</a:t>
             </a:r>
           </a:p>
         </p:txBody>
@@ -6596,7 +6812,7 @@
                 </a:solidFill>
                 <a:latin typeface="Nunito Sans"/>
               </a:rPr>
-              <a:t>¿Cómo sabrías si esa web es de fiar sin leértela entera?</a:t>
+              <a:t>¿Qué te hace sospechar de este mensaje?</a:t>
             </a:r>
           </a:p>
         </p:txBody>
@@ -6700,7 +6916,7 @@
                 </a:solidFill>
                 <a:latin typeface="Fredoka"/>
               </a:rPr>
-              <a:t>Tres pasos para verificar</a:t>
+              <a:t>Cómo se fabrica un bulo</a:t>
             </a:r>
           </a:p>
         </p:txBody>
@@ -6765,7 +6981,7 @@
                 </a:solidFill>
                 <a:latin typeface="Nunito Sans"/>
               </a:rPr>
-              <a:t>BLOQUE 1 · TRES PASOS PARA VERIFICAR</a:t>
+              <a:t>BLOQUE 1 · CÓMO SE FABRICA UN BULO</a:t>
             </a:r>
           </a:p>
         </p:txBody>
@@ -6804,7 +7020,7 @@
                 </a:solidFill>
                 <a:latin typeface="Fredoka"/>
               </a:rPr>
-              <a:t>Verificar</a:t>
+              <a:t>Bulo</a:t>
             </a:r>
           </a:p>
         </p:txBody>
@@ -6886,7 +7102,7 @@
                 </a:solidFill>
                 <a:latin typeface="Nunito Sans"/>
               </a:rPr>
-              <a:t>Verificar es comprobar si una información es verdad antes de creerla o compartirla.</a:t>
+              <a:t>Un bulo es una mentira que se hace pasar por noticia verdadera para engañar.</a:t>
             </a:r>
           </a:p>
         </p:txBody>
@@ -6934,7 +7150,7 @@
                 </a:solidFill>
                 <a:latin typeface="Nunito Sans"/>
               </a:rPr>
-              <a:t>No hace falta ser experto: hay </a:t>
+              <a:t>No es un error: alguien lo </a:t>
             </a:r>
             <a:r>
               <a:rPr sz="2800" b="1">
@@ -6943,7 +7159,7 @@
                 </a:solidFill>
                 <a:latin typeface="Nunito Sans"/>
               </a:rPr>
-              <a:t>pasos</a:t>
+              <a:t>inventa</a:t>
             </a:r>
             <a:r>
               <a:rPr sz="2800" b="0">
@@ -6952,7 +7168,7 @@
                 </a:solidFill>
                 <a:latin typeface="Nunito Sans"/>
               </a:rPr>
-              <a:t> sencillos</a:t>
+              <a:t> a propósito</a:t>
             </a:r>
           </a:p>
           <a:p>
@@ -6977,7 +7193,7 @@
                 </a:solidFill>
                 <a:latin typeface="Nunito Sans"/>
               </a:rPr>
-              <a:t>Paso 1: lectura lateral</a:t>
+              <a:t>Busca dinero, fama, hacer daño o reírse de otros</a:t>
             </a:r>
           </a:p>
           <a:p>
@@ -7002,7 +7218,7 @@
                 </a:solidFill>
                 <a:latin typeface="Nunito Sans"/>
               </a:rPr>
-              <a:t>Paso 2: la fecha. Paso 3: el origen de la imagen</a:t>
+              <a:t>Se extiende por WhatsApp, TikTok y otras redes</a:t>
             </a:r>
           </a:p>
         </p:txBody>
@@ -7067,7 +7283,7 @@
                 </a:solidFill>
                 <a:latin typeface="Nunito Sans"/>
               </a:rPr>
-              <a:t>BLOQUE 1 · TRES PASOS PARA VERIFICAR</a:t>
+              <a:t>BLOQUE 1 · CÓMO SE FABRICA UN BULO</a:t>
             </a:r>
           </a:p>
         </p:txBody>
@@ -7106,64 +7322,21 @@
                 </a:solidFill>
                 <a:latin typeface="Fredoka"/>
               </a:rPr>
-              <a:t>Lectura lateral</a:t>
-            </a:r>
-          </a:p>
-        </p:txBody>
-      </p:sp>
-      <p:sp>
-        <p:nvSpPr>
-          <p:cNvPr id="4" name="Rectangle 3"/>
-          <p:cNvSpPr/>
-          <p:nvPr/>
-        </p:nvSpPr>
-        <p:spPr>
-          <a:xfrm>
-            <a:off x="640000" y="1650000"/>
-            <a:ext cx="10912000" cy="1150000"/>
-          </a:xfrm>
-          <a:prstGeom prst="rect">
-            <a:avLst/>
-          </a:prstGeom>
-          <a:solidFill>
-            <a:srgbClr val="EAF0F7"/>
-          </a:solidFill>
-          <a:ln>
-            <a:noFill/>
-          </a:ln>
-        </p:spPr>
-        <p:style>
-          <a:lnRef idx="1">
-            <a:schemeClr val="accent1"/>
-          </a:lnRef>
-          <a:fillRef idx="3">
-            <a:schemeClr val="accent1"/>
-          </a:fillRef>
-          <a:effectRef idx="2">
-            <a:schemeClr val="accent1"/>
-          </a:effectRef>
-          <a:fontRef idx="minor">
-            <a:schemeClr val="lt1"/>
-          </a:fontRef>
-        </p:style>
-        <p:txBody>
-          <a:bodyPr rtlCol="0" anchor="ctr"/>
-          <a:lstStyle/>
-          <a:p>
-            <a:pPr algn="ctr"/>
-          </a:p>
-        </p:txBody>
-      </p:sp>
-      <p:sp>
-        <p:nvSpPr>
-          <p:cNvPr id="5" name="TextBox 4"/>
+              <a:t>Ingredientes de un bulo</a:t>
+            </a:r>
+          </a:p>
+        </p:txBody>
+      </p:sp>
+      <p:sp>
+        <p:nvSpPr>
+          <p:cNvPr id="4" name="TextBox 3"/>
           <p:cNvSpPr txBox="1"/>
           <p:nvPr/>
         </p:nvSpPr>
         <p:spPr>
           <a:xfrm>
-            <a:off x="840000" y="1730000"/>
-            <a:ext cx="10512000" cy="1000000"/>
+            <a:off x="640000" y="1650000"/>
+            <a:ext cx="10912000" cy="4808000"/>
           </a:xfrm>
           <a:prstGeom prst="rect">
             <a:avLst/>
@@ -7171,45 +7344,6 @@
           <a:noFill/>
         </p:spPr>
         <p:txBody>
-          <a:bodyPr wrap="square" anchor="ctr">
-            <a:spAutoFit/>
-          </a:bodyPr>
-          <a:lstStyle/>
-          <a:p>
-            <a:pPr>
-              <a:spcAft>
-                <a:spcPts val="1260"/>
-              </a:spcAft>
-            </a:pPr>
-            <a:r>
-              <a:rPr sz="2800" b="1">
-                <a:solidFill>
-                  <a:srgbClr val="1F2A44"/>
-                </a:solidFill>
-                <a:latin typeface="Nunito Sans"/>
-              </a:rPr>
-              <a:t>Salir de la página y buscar en otras qué dicen de ella y de lo que cuenta.</a:t>
-            </a:r>
-          </a:p>
-        </p:txBody>
-      </p:sp>
-      <p:sp>
-        <p:nvSpPr>
-          <p:cNvPr id="6" name="TextBox 5"/>
-          <p:cNvSpPr txBox="1"/>
-          <p:nvPr/>
-        </p:nvSpPr>
-        <p:spPr>
-          <a:xfrm>
-            <a:off x="640000" y="3000000"/>
-            <a:ext cx="10912000" cy="3458000"/>
-          </a:xfrm>
-          <a:prstGeom prst="rect">
-            <a:avLst/>
-          </a:prstGeom>
-          <a:noFill/>
-        </p:spPr>
-        <p:txBody>
           <a:bodyPr wrap="square">
             <a:spAutoFit/>
           </a:bodyPr>
@@ -7230,22 +7364,47 @@
               <a:t>• </a:t>
             </a:r>
             <a:r>
+              <a:rPr sz="2800" b="1">
+                <a:solidFill>
+                  <a:srgbClr val="1F2A44"/>
+                </a:solidFill>
+                <a:latin typeface="Nunito Sans"/>
+              </a:rPr>
+              <a:t>Urgencia:</a:t>
+            </a:r>
+            <a:r>
               <a:rPr sz="2800" b="0">
                 <a:solidFill>
                   <a:srgbClr val="1F2A44"/>
                 </a:solidFill>
                 <a:latin typeface="Nunito Sans"/>
               </a:rPr>
-              <a:t>Abre </a:t>
-            </a:r>
+              <a:t> «¡Última hora!», «¡Compártelo ya!»</a:t>
+            </a:r>
+          </a:p>
+          <a:p>
+            <a:pPr>
+              <a:spcAft>
+                <a:spcPts val="1260"/>
+              </a:spcAft>
+            </a:pPr>
             <a:r>
               <a:rPr sz="2800" b="1">
                 <a:solidFill>
-                  <a:srgbClr val="1F2A44"/>
-                </a:solidFill>
-                <a:latin typeface="Nunito Sans"/>
-              </a:rPr>
-              <a:t>otras pestañas</a:t>
+                  <a:srgbClr val="E8793A"/>
+                </a:solidFill>
+                <a:latin typeface="Nunito Sans"/>
+              </a:rPr>
+              <a:t>• </a:t>
+            </a:r>
+            <a:r>
+              <a:rPr sz="2800" b="1">
+                <a:solidFill>
+                  <a:srgbClr val="1F2A44"/>
+                </a:solidFill>
+                <a:latin typeface="Nunito Sans"/>
+              </a:rPr>
+              <a:t>Emoción fuerte:</a:t>
             </a:r>
             <a:r>
               <a:rPr sz="2800" b="0">
@@ -7254,7 +7413,7 @@
                 </a:solidFill>
                 <a:latin typeface="Nunito Sans"/>
               </a:rPr>
-              <a:t>: busca el nombre de la web o del autor</a:t>
+              <a:t> miedo, enfado o pena</a:t>
             </a:r>
           </a:p>
           <a:p>
@@ -7273,13 +7432,22 @@
               <a:t>• </a:t>
             </a:r>
             <a:r>
+              <a:rPr sz="2800" b="1">
+                <a:solidFill>
+                  <a:srgbClr val="1F2A44"/>
+                </a:solidFill>
+                <a:latin typeface="Nunito Sans"/>
+              </a:rPr>
+              <a:t>Fuente vaga:</a:t>
+            </a:r>
+            <a:r>
               <a:rPr sz="2800" b="0">
                 <a:solidFill>
                   <a:srgbClr val="1F2A44"/>
                 </a:solidFill>
                 <a:latin typeface="Nunito Sans"/>
               </a:rPr>
-              <a:t>¿Qué dicen de ella medios serios o verificadores?</a:t>
+              <a:t> «un amigo policía», «lo dice un médico»</a:t>
             </a:r>
           </a:p>
           <a:p>
@@ -7298,38 +7466,47 @@
               <a:t>• </a:t>
             </a:r>
             <a:r>
+              <a:rPr sz="2800" b="1">
+                <a:solidFill>
+                  <a:srgbClr val="1F2A44"/>
+                </a:solidFill>
+                <a:latin typeface="Nunito Sans"/>
+              </a:rPr>
+              <a:t>Sin fecha ni lugar exacto</a:t>
+            </a:r>
+          </a:p>
+          <a:p>
+            <a:pPr>
+              <a:spcAft>
+                <a:spcPts val="1260"/>
+              </a:spcAft>
+            </a:pPr>
+            <a:r>
+              <a:rPr sz="2800" b="1">
+                <a:solidFill>
+                  <a:srgbClr val="E8793A"/>
+                </a:solidFill>
+                <a:latin typeface="Nunito Sans"/>
+              </a:rPr>
+              <a:t>• </a:t>
+            </a:r>
+            <a:r>
+              <a:rPr sz="2800" b="1">
+                <a:solidFill>
+                  <a:srgbClr val="1F2A44"/>
+                </a:solidFill>
+                <a:latin typeface="Nunito Sans"/>
+              </a:rPr>
+              <a:t>Imagen llamativa</a:t>
+            </a:r>
+            <a:r>
               <a:rPr sz="2800" b="0">
                 <a:solidFill>
                   <a:srgbClr val="1F2A44"/>
                 </a:solidFill>
                 <a:latin typeface="Nunito Sans"/>
               </a:rPr>
-              <a:t>¿Otras fuentes serias cuentan lo mismo?</a:t>
-            </a:r>
-          </a:p>
-          <a:p>
-            <a:pPr>
-              <a:spcAft>
-                <a:spcPts val="1260"/>
-              </a:spcAft>
-            </a:pPr>
-            <a:r>
-              <a:rPr sz="2800" b="1">
-                <a:solidFill>
-                  <a:srgbClr val="E8793A"/>
-                </a:solidFill>
-                <a:latin typeface="Nunito Sans"/>
-              </a:rPr>
-              <a:t>• </a:t>
-            </a:r>
-            <a:r>
-              <a:rPr sz="2800" b="0">
-                <a:solidFill>
-                  <a:srgbClr val="1F2A44"/>
-                </a:solidFill>
-                <a:latin typeface="Nunito Sans"/>
-              </a:rPr>
-              <a:t>Así trabajan los verificadores profesionales</a:t>
+              <a:t>, a veces de otro sitio o de otro momento</a:t>
             </a:r>
           </a:p>
         </p:txBody>
@@ -7348,7 +7525,7 @@
     <p:bg>
       <p:bgPr>
         <a:solidFill>
-          <a:srgbClr val="FBF7EF"/>
+          <a:srgbClr val="1F2A44"/>
         </a:solidFill>
         <a:effectLst/>
       </p:bgPr>
@@ -7368,8 +7545,8 @@
         </p:nvSpPr>
         <p:spPr>
           <a:xfrm>
-            <a:off x="640000" y="380000"/>
-            <a:ext cx="10912000" cy="420000"/>
+            <a:off x="640000" y="2300000"/>
+            <a:ext cx="10912000" cy="500000"/>
           </a:xfrm>
           <a:prstGeom prst="rect">
             <a:avLst/>
@@ -7384,17 +7561,17 @@
           <a:p>
             <a:pPr>
               <a:spcAft>
-                <a:spcPts val="630"/>
-              </a:spcAft>
-            </a:pPr>
-            <a:r>
-              <a:rPr sz="1400" b="1">
-                <a:solidFill>
-                  <a:srgbClr val="E8793A"/>
-                </a:solidFill>
-                <a:latin typeface="Nunito Sans"/>
-              </a:rPr>
-              <a:t>BLOQUE 1 · TRES PASOS PARA VERIFICAR</a:t>
+                <a:spcPts val="810"/>
+              </a:spcAft>
+            </a:pPr>
+            <a:r>
+              <a:rPr sz="1800" b="1">
+                <a:solidFill>
+                  <a:srgbClr val="F4B183"/>
+                </a:solidFill>
+                <a:latin typeface="Nunito Sans"/>
+              </a:rPr>
+              <a:t>BLOQUE 2</a:t>
             </a:r>
           </a:p>
         </p:txBody>
@@ -7407,7 +7584,7 @@
         </p:nvSpPr>
         <p:spPr>
           <a:xfrm>
-            <a:off x="640000" y="760000"/>
+            <a:off x="640000" y="2800000"/>
             <a:ext cx="10912000" cy="800000"/>
           </a:xfrm>
           <a:prstGeom prst="rect">
@@ -7423,377 +7600,17 @@
           <a:p>
             <a:pPr>
               <a:spcAft>
-                <a:spcPts val="1710"/>
-              </a:spcAft>
-            </a:pPr>
-            <a:r>
-              <a:rPr sz="3800" b="1">
-                <a:solidFill>
-                  <a:srgbClr val="1F2A44"/>
+                <a:spcPts val="2160"/>
+              </a:spcAft>
+            </a:pPr>
+            <a:r>
+              <a:rPr sz="4800" b="1">
+                <a:solidFill>
+                  <a:srgbClr val="FBF7EF"/>
                 </a:solidFill>
                 <a:latin typeface="Fredoka"/>
               </a:rPr>
-              <a:t>Leer en vertical o en lateral</a:t>
-            </a:r>
-          </a:p>
-        </p:txBody>
-      </p:sp>
-      <p:sp>
-        <p:nvSpPr>
-          <p:cNvPr id="4" name="Rectangle 3"/>
-          <p:cNvSpPr/>
-          <p:nvPr/>
-        </p:nvSpPr>
-        <p:spPr>
-          <a:xfrm>
-            <a:off x="640000" y="1650000"/>
-            <a:ext cx="5306000" cy="4400000"/>
-          </a:xfrm>
-          <a:prstGeom prst="rect">
-            <a:avLst/>
-          </a:prstGeom>
-          <a:solidFill>
-            <a:srgbClr val="FBE3D2"/>
-          </a:solidFill>
-          <a:ln>
-            <a:noFill/>
-          </a:ln>
-        </p:spPr>
-        <p:style>
-          <a:lnRef idx="1">
-            <a:schemeClr val="accent1"/>
-          </a:lnRef>
-          <a:fillRef idx="3">
-            <a:schemeClr val="accent1"/>
-          </a:fillRef>
-          <a:effectRef idx="2">
-            <a:schemeClr val="accent1"/>
-          </a:effectRef>
-          <a:fontRef idx="minor">
-            <a:schemeClr val="lt1"/>
-          </a:fontRef>
-        </p:style>
-        <p:txBody>
-          <a:bodyPr rtlCol="0" anchor="ctr"/>
-          <a:lstStyle/>
-          <a:p>
-            <a:pPr algn="ctr"/>
-          </a:p>
-        </p:txBody>
-      </p:sp>
-      <p:sp>
-        <p:nvSpPr>
-          <p:cNvPr id="5" name="TextBox 4"/>
-          <p:cNvSpPr txBox="1"/>
-          <p:nvPr/>
-        </p:nvSpPr>
-        <p:spPr>
-          <a:xfrm>
-            <a:off x="840000" y="1750000"/>
-            <a:ext cx="4906000" cy="600000"/>
-          </a:xfrm>
-          <a:prstGeom prst="rect">
-            <a:avLst/>
-          </a:prstGeom>
-          <a:noFill/>
-        </p:spPr>
-        <p:txBody>
-          <a:bodyPr wrap="square">
-            <a:spAutoFit/>
-          </a:bodyPr>
-          <a:lstStyle/>
-          <a:p>
-            <a:pPr>
-              <a:spcAft>
-                <a:spcPts val="1260"/>
-              </a:spcAft>
-            </a:pPr>
-            <a:r>
-              <a:rPr sz="2800" b="1">
-                <a:solidFill>
-                  <a:srgbClr val="C2531C"/>
-                </a:solidFill>
-                <a:latin typeface="Nunito Sans"/>
-              </a:rPr>
-              <a:t>En vertical (me quedo dentro)</a:t>
-            </a:r>
-          </a:p>
-        </p:txBody>
-      </p:sp>
-      <p:sp>
-        <p:nvSpPr>
-          <p:cNvPr id="6" name="TextBox 5"/>
-          <p:cNvSpPr txBox="1"/>
-          <p:nvPr/>
-        </p:nvSpPr>
-        <p:spPr>
-          <a:xfrm>
-            <a:off x="840000" y="2400000"/>
-            <a:ext cx="4906000" cy="3500000"/>
-          </a:xfrm>
-          <a:prstGeom prst="rect">
-            <a:avLst/>
-          </a:prstGeom>
-          <a:noFill/>
-        </p:spPr>
-        <p:txBody>
-          <a:bodyPr wrap="square">
-            <a:spAutoFit/>
-          </a:bodyPr>
-          <a:lstStyle/>
-          <a:p>
-            <a:pPr>
-              <a:spcAft>
-                <a:spcPts val="1170"/>
-              </a:spcAft>
-            </a:pPr>
-            <a:r>
-              <a:rPr sz="2600" b="1">
-                <a:solidFill>
-                  <a:srgbClr val="E8793A"/>
-                </a:solidFill>
-                <a:latin typeface="Nunito Sans"/>
-              </a:rPr>
-              <a:t>• </a:t>
-            </a:r>
-            <a:r>
-              <a:rPr sz="2600" b="0">
-                <a:solidFill>
-                  <a:srgbClr val="1F2A44"/>
-                </a:solidFill>
-                <a:latin typeface="Nunito Sans"/>
-              </a:rPr>
-              <a:t>Me fío por el diseño bonito</a:t>
-            </a:r>
-          </a:p>
-          <a:p>
-            <a:pPr>
-              <a:spcAft>
-                <a:spcPts val="1170"/>
-              </a:spcAft>
-            </a:pPr>
-            <a:r>
-              <a:rPr sz="2600" b="1">
-                <a:solidFill>
-                  <a:srgbClr val="E8793A"/>
-                </a:solidFill>
-                <a:latin typeface="Nunito Sans"/>
-              </a:rPr>
-              <a:t>• </a:t>
-            </a:r>
-            <a:r>
-              <a:rPr sz="2600" b="0">
-                <a:solidFill>
-                  <a:srgbClr val="1F2A44"/>
-                </a:solidFill>
-                <a:latin typeface="Nunito Sans"/>
-              </a:rPr>
-              <a:t>Leo el «Quiénes somos» de la propia web</a:t>
-            </a:r>
-          </a:p>
-          <a:p>
-            <a:pPr>
-              <a:spcAft>
-                <a:spcPts val="1170"/>
-              </a:spcAft>
-            </a:pPr>
-            <a:r>
-              <a:rPr sz="2600" b="1">
-                <a:solidFill>
-                  <a:srgbClr val="E8793A"/>
-                </a:solidFill>
-                <a:latin typeface="Nunito Sans"/>
-              </a:rPr>
-              <a:t>• </a:t>
-            </a:r>
-            <a:r>
-              <a:rPr sz="2600" b="0">
-                <a:solidFill>
-                  <a:srgbClr val="1F2A44"/>
-                </a:solidFill>
-                <a:latin typeface="Nunito Sans"/>
-              </a:rPr>
-              <a:t>Solo miro lo que la página quiere que vea</a:t>
-            </a:r>
-          </a:p>
-        </p:txBody>
-      </p:sp>
-      <p:sp>
-        <p:nvSpPr>
-          <p:cNvPr id="7" name="Rectangle 6"/>
-          <p:cNvSpPr/>
-          <p:nvPr/>
-        </p:nvSpPr>
-        <p:spPr>
-          <a:xfrm>
-            <a:off x="6246000" y="1650000"/>
-            <a:ext cx="5306000" cy="4400000"/>
-          </a:xfrm>
-          <a:prstGeom prst="rect">
-            <a:avLst/>
-          </a:prstGeom>
-          <a:solidFill>
-            <a:srgbClr val="EAF0F7"/>
-          </a:solidFill>
-          <a:ln>
-            <a:noFill/>
-          </a:ln>
-        </p:spPr>
-        <p:style>
-          <a:lnRef idx="1">
-            <a:schemeClr val="accent1"/>
-          </a:lnRef>
-          <a:fillRef idx="3">
-            <a:schemeClr val="accent1"/>
-          </a:fillRef>
-          <a:effectRef idx="2">
-            <a:schemeClr val="accent1"/>
-          </a:effectRef>
-          <a:fontRef idx="minor">
-            <a:schemeClr val="lt1"/>
-          </a:fontRef>
-        </p:style>
-        <p:txBody>
-          <a:bodyPr rtlCol="0" anchor="ctr"/>
-          <a:lstStyle/>
-          <a:p>
-            <a:pPr algn="ctr"/>
-          </a:p>
-        </p:txBody>
-      </p:sp>
-      <p:sp>
-        <p:nvSpPr>
-          <p:cNvPr id="8" name="TextBox 7"/>
-          <p:cNvSpPr txBox="1"/>
-          <p:nvPr/>
-        </p:nvSpPr>
-        <p:spPr>
-          <a:xfrm>
-            <a:off x="6446000" y="1750000"/>
-            <a:ext cx="4906000" cy="600000"/>
-          </a:xfrm>
-          <a:prstGeom prst="rect">
-            <a:avLst/>
-          </a:prstGeom>
-          <a:noFill/>
-        </p:spPr>
-        <p:txBody>
-          <a:bodyPr wrap="square">
-            <a:spAutoFit/>
-          </a:bodyPr>
-          <a:lstStyle/>
-          <a:p>
-            <a:pPr>
-              <a:spcAft>
-                <a:spcPts val="1260"/>
-              </a:spcAft>
-            </a:pPr>
-            <a:r>
-              <a:rPr sz="2800" b="1">
-                <a:solidFill>
-                  <a:srgbClr val="2F6FB5"/>
-                </a:solidFill>
-                <a:latin typeface="Nunito Sans"/>
-              </a:rPr>
-              <a:t>En lateral (salgo fuera)</a:t>
-            </a:r>
-          </a:p>
-        </p:txBody>
-      </p:sp>
-      <p:sp>
-        <p:nvSpPr>
-          <p:cNvPr id="9" name="TextBox 8"/>
-          <p:cNvSpPr txBox="1"/>
-          <p:nvPr/>
-        </p:nvSpPr>
-        <p:spPr>
-          <a:xfrm>
-            <a:off x="6446000" y="2400000"/>
-            <a:ext cx="4906000" cy="3500000"/>
-          </a:xfrm>
-          <a:prstGeom prst="rect">
-            <a:avLst/>
-          </a:prstGeom>
-          <a:noFill/>
-        </p:spPr>
-        <p:txBody>
-          <a:bodyPr wrap="square">
-            <a:spAutoFit/>
-          </a:bodyPr>
-          <a:lstStyle/>
-          <a:p>
-            <a:pPr>
-              <a:spcAft>
-                <a:spcPts val="1170"/>
-              </a:spcAft>
-            </a:pPr>
-            <a:r>
-              <a:rPr sz="2600" b="1">
-                <a:solidFill>
-                  <a:srgbClr val="E8793A"/>
-                </a:solidFill>
-                <a:latin typeface="Nunito Sans"/>
-              </a:rPr>
-              <a:t>• </a:t>
-            </a:r>
-            <a:r>
-              <a:rPr sz="2600" b="0">
-                <a:solidFill>
-                  <a:srgbClr val="1F2A44"/>
-                </a:solidFill>
-                <a:latin typeface="Nunito Sans"/>
-              </a:rPr>
-              <a:t>Busco qué dicen otros de esa web</a:t>
-            </a:r>
-          </a:p>
-          <a:p>
-            <a:pPr>
-              <a:spcAft>
-                <a:spcPts val="1170"/>
-              </a:spcAft>
-            </a:pPr>
-            <a:r>
-              <a:rPr sz="2600" b="1">
-                <a:solidFill>
-                  <a:srgbClr val="E8793A"/>
-                </a:solidFill>
-                <a:latin typeface="Nunito Sans"/>
-              </a:rPr>
-              <a:t>• </a:t>
-            </a:r>
-            <a:r>
-              <a:rPr sz="2600" b="0">
-                <a:solidFill>
-                  <a:srgbClr val="1F2A44"/>
-                </a:solidFill>
-                <a:latin typeface="Nunito Sans"/>
-              </a:rPr>
-              <a:t>Compruebo si otras fuentes cuentan lo mismo</a:t>
-            </a:r>
-          </a:p>
-          <a:p>
-            <a:pPr>
-              <a:spcAft>
-                <a:spcPts val="1170"/>
-              </a:spcAft>
-            </a:pPr>
-            <a:r>
-              <a:rPr sz="2600" b="1">
-                <a:solidFill>
-                  <a:srgbClr val="E8793A"/>
-                </a:solidFill>
-                <a:latin typeface="Nunito Sans"/>
-              </a:rPr>
-              <a:t>• </a:t>
-            </a:r>
-            <a:r>
-              <a:rPr sz="2600" b="0">
-                <a:solidFill>
-                  <a:srgbClr val="1F2A44"/>
-                </a:solidFill>
-                <a:latin typeface="Nunito Sans"/>
-              </a:rPr>
-              <a:t>En dos minutos sé mucho más</a:t>
+              <a:t>Por qué se comparten</a:t>
             </a:r>
           </a:p>
         </p:txBody>
@@ -7858,7 +7675,7 @@
                 </a:solidFill>
                 <a:latin typeface="Nunito Sans"/>
               </a:rPr>
-              <a:t>BLOQUE 1 · TRES PASOS PARA VERIFICAR</a:t>
+              <a:t>BLOQUE 2 · POR QUÉ SE COMPARTEN</a:t>
             </a:r>
           </a:p>
         </p:txBody>
@@ -7897,7 +7714,7 @@
                 </a:solidFill>
                 <a:latin typeface="Fredoka"/>
               </a:rPr>
-              <a:t>La fecha y el origen de la imagen</a:t>
+              <a:t>¿Por qué compartimos bulos?</a:t>
             </a:r>
           </a:p>
         </p:txBody>
@@ -7910,8 +7727,8 @@
         </p:nvSpPr>
         <p:spPr>
           <a:xfrm>
-            <a:off x="640000" y="1650000"/>
-            <a:ext cx="10912000" cy="4808000"/>
+            <a:off x="840000" y="1730000"/>
+            <a:ext cx="10512000" cy="1000000"/>
           </a:xfrm>
           <a:prstGeom prst="rect">
             <a:avLst/>
@@ -7919,6 +7736,45 @@
           <a:noFill/>
         </p:spPr>
         <p:txBody>
+          <a:bodyPr wrap="square" anchor="ctr">
+            <a:spAutoFit/>
+          </a:bodyPr>
+          <a:lstStyle/>
+          <a:p>
+            <a:pPr>
+              <a:spcAft>
+                <a:spcPts val="1080"/>
+              </a:spcAft>
+            </a:pPr>
+            <a:r>
+              <a:rPr sz="2400" b="0">
+                <a:solidFill>
+                  <a:srgbClr val="1F2A44"/>
+                </a:solidFill>
+                <a:latin typeface="Nunito Sans"/>
+              </a:rPr>
+              <a:t>Los bulos no se mueven solos: los movemos las personas.</a:t>
+            </a:r>
+          </a:p>
+        </p:txBody>
+      </p:sp>
+      <p:sp>
+        <p:nvSpPr>
+          <p:cNvPr id="5" name="TextBox 4"/>
+          <p:cNvSpPr txBox="1"/>
+          <p:nvPr/>
+        </p:nvSpPr>
+        <p:spPr>
+          <a:xfrm>
+            <a:off x="640000" y="3000000"/>
+            <a:ext cx="10912000" cy="3458000"/>
+          </a:xfrm>
+          <a:prstGeom prst="rect">
+            <a:avLst/>
+          </a:prstGeom>
+          <a:noFill/>
+        </p:spPr>
+        <p:txBody>
           <a:bodyPr wrap="square">
             <a:spAutoFit/>
           </a:bodyPr>
@@ -7939,13 +7795,22 @@
               <a:t>• </a:t>
             </a:r>
             <a:r>
+              <a:rPr sz="2800" b="0">
+                <a:solidFill>
+                  <a:srgbClr val="1F2A44"/>
+                </a:solidFill>
+                <a:latin typeface="Nunito Sans"/>
+              </a:rPr>
+              <a:t>Nos </a:t>
+            </a:r>
+            <a:r>
               <a:rPr sz="2800" b="1">
                 <a:solidFill>
                   <a:srgbClr val="1F2A44"/>
                 </a:solidFill>
                 <a:latin typeface="Nunito Sans"/>
               </a:rPr>
-              <a:t>Fecha:</a:t>
+              <a:t>emocionan</a:t>
             </a:r>
             <a:r>
               <a:rPr sz="2800" b="0">
@@ -7954,7 +7819,7 @@
                 </a:solidFill>
                 <a:latin typeface="Nunito Sans"/>
               </a:rPr>
-              <a:t> una noticia vieja compartida hoy parece nueva</a:t>
+              <a:t> y queremos avisar a los demás</a:t>
             </a:r>
           </a:p>
           <a:p>
@@ -7979,7 +7844,16 @@
                 </a:solidFill>
                 <a:latin typeface="Nunito Sans"/>
               </a:rPr>
-              <a:t>Mira cuándo se publicó, no cuándo te llegó</a:t>
+              <a:t>Lo manda alguien de </a:t>
+            </a:r>
+            <a:r>
+              <a:rPr sz="2800" b="1">
+                <a:solidFill>
+                  <a:srgbClr val="1F2A44"/>
+                </a:solidFill>
+                <a:latin typeface="Nunito Sans"/>
+              </a:rPr>
+              <a:t>confianza</a:t>
             </a:r>
           </a:p>
           <a:p>
@@ -7998,13 +7872,38 @@
               <a:t>• </a:t>
             </a:r>
             <a:r>
+              <a:rPr sz="2800" b="0">
+                <a:solidFill>
+                  <a:srgbClr val="1F2A44"/>
+                </a:solidFill>
+                <a:latin typeface="Nunito Sans"/>
+              </a:rPr>
+              <a:t>Encaja con lo que </a:t>
+            </a:r>
+            <a:r>
               <a:rPr sz="2800" b="1">
                 <a:solidFill>
                   <a:srgbClr val="1F2A44"/>
                 </a:solidFill>
                 <a:latin typeface="Nunito Sans"/>
               </a:rPr>
-              <a:t>Imagen:</a:t>
+              <a:t>ya pensábamos</a:t>
+            </a:r>
+          </a:p>
+          <a:p>
+            <a:pPr>
+              <a:spcAft>
+                <a:spcPts val="1260"/>
+              </a:spcAft>
+            </a:pPr>
+            <a:r>
+              <a:rPr sz="2800" b="1">
+                <a:solidFill>
+                  <a:srgbClr val="E8793A"/>
+                </a:solidFill>
+                <a:latin typeface="Nunito Sans"/>
+              </a:rPr>
+              <a:t>• </a:t>
             </a:r>
             <a:r>
               <a:rPr sz="2800" b="0">
@@ -8013,7 +7912,7 @@
                 </a:solidFill>
                 <a:latin typeface="Nunito Sans"/>
               </a:rPr>
-              <a:t> haz una </a:t>
+              <a:t>Compartir es </a:t>
             </a:r>
             <a:r>
               <a:rPr sz="2800" b="1">
@@ -8022,7 +7921,7 @@
                 </a:solidFill>
                 <a:latin typeface="Nunito Sans"/>
               </a:rPr>
-              <a:t>búsqueda inversa</a:t>
+              <a:t>muy fácil</a:t>
             </a:r>
             <a:r>
               <a:rPr sz="2800" b="0">
@@ -8031,7 +7930,7 @@
                 </a:solidFill>
                 <a:latin typeface="Nunito Sans"/>
               </a:rPr>
-              <a:t> (por ejemplo, con Google Lens)</a:t>
+              <a:t>: un solo clic</a:t>
             </a:r>
           </a:p>
           <a:p>
@@ -8056,7 +7955,7 @@
                 </a:solidFill>
                 <a:latin typeface="Nunito Sans"/>
               </a:rPr>
-              <a:t>Puede enseñarte dónde apareció antes esa foto (no siempre la encuentra)</a:t>
+              <a:t>En Twitter, las noticias falsas se compartían más y más rápido (MIT, 2018)</a:t>
             </a:r>
           </a:p>
         </p:txBody>
